--- a/발표자료_최종본_v4.pptx
+++ b/발표자료_최종본_v4.pptx
@@ -12106,23 +12106,281 @@
       </p:grpSpPr>
       <p:sp>
         <p:nvSpPr>
-          <p:cNvPr id="2" name="Rectangle 1"/>
-          <p:cNvSpPr/>
+          <p:cNvPr id="3" name="TextBox 2"/>
+          <p:cNvSpPr txBox="1"/>
           <p:nvPr/>
         </p:nvSpPr>
         <p:spPr>
           <a:xfrm>
-            <a:off x="0" y="0"/>
-            <a:ext cx="12191695" cy="146304"/>
+            <a:off x="502920" y="292608"/>
+            <a:ext cx="10515600" cy="334137"/>
           </a:xfrm>
           <a:prstGeom prst="rect">
             <a:avLst/>
           </a:prstGeom>
+          <a:noFill/>
+        </p:spPr>
+        <p:txBody>
+          <a:bodyPr wrap="square">
+            <a:spAutoFit/>
+          </a:bodyPr>
+          <a:lstStyle/>
+          <a:p>
+            <a:pPr algn="l">
+              <a:spcAft>
+                <a:spcPts val="600"/>
+              </a:spcAft>
+              <a:defRPr/>
+            </a:pPr>
+            <a:r>
+              <a:rPr sz="1600" b="1">
+                <a:solidFill>
+                  <a:srgbClr val="2A78D6"/>
+                </a:solidFill>
+                <a:latin typeface="맑은 고딕"/>
+              </a:rPr>
+              <a:t>05. 서비스</a:t>
+            </a:r>
+          </a:p>
+        </p:txBody>
+      </p:sp>
+      <p:sp>
+        <p:nvSpPr>
+          <p:cNvPr id="4" name="TextBox 3"/>
+          <p:cNvSpPr txBox="1"/>
+          <p:nvPr/>
+        </p:nvSpPr>
+        <p:spPr>
+          <a:xfrm>
+            <a:off x="502920" y="621792"/>
+            <a:ext cx="11155680" cy="547878"/>
+          </a:xfrm>
+          <a:prstGeom prst="rect">
+            <a:avLst/>
+          </a:prstGeom>
+          <a:noFill/>
+        </p:spPr>
+        <p:txBody>
+          <a:bodyPr wrap="square">
+            <a:spAutoFit/>
+          </a:bodyPr>
+          <a:lstStyle/>
+          <a:p>
+            <a:pPr algn="l">
+              <a:spcAft>
+                <a:spcPts val="600"/>
+              </a:spcAft>
+              <a:defRPr/>
+            </a:pPr>
+            <a:r>
+              <a:rPr sz="3000" b="1" dirty="0" err="1">
+                <a:solidFill>
+                  <a:srgbClr val="104281"/>
+                </a:solidFill>
+                <a:latin typeface="맑은 고딕"/>
+              </a:rPr>
+              <a:t>업로드는</a:t>
+            </a:r>
+            <a:r>
+              <a:rPr sz="3000" b="1" dirty="0">
+                <a:solidFill>
+                  <a:srgbClr val="104281"/>
+                </a:solidFill>
+                <a:latin typeface="맑은 고딕"/>
+              </a:rPr>
+              <a:t> </a:t>
+            </a:r>
+            <a:r>
+              <a:rPr sz="3000" b="1" dirty="0" err="1">
+                <a:solidFill>
+                  <a:srgbClr val="104281"/>
+                </a:solidFill>
+                <a:latin typeface="맑은 고딕"/>
+              </a:rPr>
+              <a:t>사라지지</a:t>
+            </a:r>
+            <a:r>
+              <a:rPr sz="3000" b="1" dirty="0">
+                <a:solidFill>
+                  <a:srgbClr val="104281"/>
+                </a:solidFill>
+                <a:latin typeface="맑은 고딕"/>
+              </a:rPr>
+              <a:t> </a:t>
+            </a:r>
+            <a:r>
+              <a:rPr sz="3000" b="1" dirty="0" err="1">
+                <a:solidFill>
+                  <a:srgbClr val="104281"/>
+                </a:solidFill>
+                <a:latin typeface="맑은 고딕"/>
+              </a:rPr>
+              <a:t>않는다</a:t>
+            </a:r>
+            <a:r>
+              <a:rPr sz="3000" b="1" dirty="0">
+                <a:solidFill>
+                  <a:srgbClr val="104281"/>
+                </a:solidFill>
+                <a:latin typeface="맑은 고딕"/>
+              </a:rPr>
+              <a:t> — </a:t>
+            </a:r>
+            <a:r>
+              <a:rPr sz="3000" b="1" dirty="0" err="1">
+                <a:solidFill>
+                  <a:srgbClr val="104281"/>
+                </a:solidFill>
+                <a:latin typeface="맑은 고딕"/>
+              </a:rPr>
+              <a:t>적재·재학습</a:t>
+            </a:r>
+            <a:r>
+              <a:rPr sz="3000" b="1" dirty="0">
+                <a:solidFill>
+                  <a:srgbClr val="104281"/>
+                </a:solidFill>
+                <a:latin typeface="맑은 고딕"/>
+              </a:rPr>
+              <a:t> </a:t>
+            </a:r>
+            <a:r>
+              <a:rPr sz="3000" b="1" dirty="0" err="1">
+                <a:solidFill>
+                  <a:srgbClr val="104281"/>
+                </a:solidFill>
+                <a:latin typeface="맑은 고딕"/>
+              </a:rPr>
+              <a:t>파이프라인</a:t>
+            </a:r>
+            <a:r>
+              <a:rPr sz="3000" b="1" dirty="0">
+                <a:solidFill>
+                  <a:srgbClr val="104281"/>
+                </a:solidFill>
+                <a:latin typeface="맑은 고딕"/>
+              </a:rPr>
+              <a:t> </a:t>
+            </a:r>
+          </a:p>
+        </p:txBody>
+      </p:sp>
+      <p:sp>
+        <p:nvSpPr>
+          <p:cNvPr id="14" name="TextBox 13"/>
+          <p:cNvSpPr txBox="1"/>
+          <p:nvPr/>
+        </p:nvSpPr>
+        <p:spPr>
+          <a:xfrm>
+            <a:off x="11475720" y="6446520"/>
+            <a:ext cx="640080" cy="266700"/>
+          </a:xfrm>
+          <a:prstGeom prst="rect">
+            <a:avLst/>
+          </a:prstGeom>
+          <a:noFill/>
+        </p:spPr>
+        <p:txBody>
+          <a:bodyPr wrap="square">
+            <a:spAutoFit/>
+          </a:bodyPr>
+          <a:lstStyle/>
+          <a:p>
+            <a:pPr algn="r">
+              <a:spcAft>
+                <a:spcPts val="600"/>
+              </a:spcAft>
+              <a:defRPr/>
+            </a:pPr>
+            <a:r>
+              <a:rPr sz="1200" b="0">
+                <a:solidFill>
+                  <a:srgbClr val="666666"/>
+                </a:solidFill>
+                <a:latin typeface="맑은 고딕"/>
+              </a:rPr>
+              <a:t>20</a:t>
+            </a:r>
+          </a:p>
+        </p:txBody>
+      </p:sp>
+      <p:sp>
+        <p:nvSpPr>
+          <p:cNvPr id="25" name="TextBox 24"/>
+          <p:cNvSpPr txBox="1"/>
+          <p:nvPr/>
+        </p:nvSpPr>
+        <p:spPr>
+          <a:xfrm>
+            <a:off x="822960" y="4892040"/>
+            <a:ext cx="10607040" cy="1463040"/>
+          </a:xfrm>
+          <a:prstGeom prst="rect">
+            <a:avLst/>
+          </a:prstGeom>
+          <a:noFill/>
+        </p:spPr>
+        <p:txBody>
+          <a:bodyPr wrap="square">
+            <a:spAutoFit/>
+          </a:bodyPr>
+          <a:lstStyle/>
+          <a:p>
+            <a:pPr>
+              <a:spcAft>
+                <a:spcPts val="800"/>
+              </a:spcAft>
+            </a:pPr>
+            <a:r>
+              <a:rPr sz="1500" b="1">
+                <a:solidFill>
+                  <a:srgbClr val="202020"/>
+                </a:solidFill>
+                <a:latin typeface="맑은 고딕"/>
+              </a:rPr>
+              <a:t>원칙: 확진 라벨 없는 데이터는 학습에 쓰지 않는다 — 모델이 자기 예측을 정답처럼 배우는 오염 방지</a:t>
+            </a:r>
+          </a:p>
+          <a:p>
+            <a:pPr>
+              <a:spcAft>
+                <a:spcPts val="800"/>
+              </a:spcAft>
+            </a:pPr>
+            <a:r>
+              <a:rPr sz="2000" b="1">
+                <a:solidFill>
+                  <a:srgbClr val="2A78D6"/>
+                </a:solidFill>
+                <a:latin typeface="맑은 고딕"/>
+              </a:rPr>
+              <a:t>"지금 174명이라는 한계는, 서비스가 돌수록 스스로 풀리는 구조입니다"</a:t>
+            </a:r>
+          </a:p>
+        </p:txBody>
+      </p:sp>
+      <p:sp>
+        <p:nvSpPr>
+          <p:cNvPr id="26" name="Rounded Rectangle 25"/>
+          <p:cNvSpPr/>
+          <p:nvPr/>
+        </p:nvSpPr>
+        <p:spPr>
+          <a:xfrm>
+            <a:off x="411480" y="2148840"/>
+            <a:ext cx="1975104" cy="1371600"/>
+          </a:xfrm>
+          <a:prstGeom prst="roundRect">
+            <a:avLst/>
+          </a:prstGeom>
           <a:solidFill>
-            <a:srgbClr val="104281"/>
+            <a:srgbClr val="EEF3FB"/>
           </a:solidFill>
-          <a:ln>
-            <a:noFill/>
+          <a:ln w="25400">
+            <a:solidFill>
+              <a:srgbClr val="2A78D6"/>
+            </a:solidFill>
           </a:ln>
         </p:spPr>
         <p:style>
@@ -12140,1778 +12398,523 @@
           </a:fontRef>
         </p:style>
         <p:txBody>
-          <a:bodyPr anchor="ctr"/>
-          <a:lstStyle/>
-          <a:p>
-            <a:pPr algn="ctr">
-              <a:defRPr/>
-            </a:pPr>
-            <a:endParaRPr lang="ko-KR" altLang="en-US"/>
-          </a:p>
-        </p:txBody>
-      </p:sp>
-      <p:sp>
-        <p:nvSpPr>
-          <p:cNvPr id="3" name="TextBox 2"/>
-          <p:cNvSpPr txBox="1"/>
+          <a:bodyPr rtlCol="0" anchor="ctr" wrap="square" lIns="54864" rIns="54864"/>
+          <a:lstStyle/>
+          <a:p>
+            <a:pPr algn="ctr"/>
+            <a:r>
+              <a:rPr sz="1550" b="1">
+                <a:solidFill>
+                  <a:srgbClr val="104281"/>
+                </a:solidFill>
+                <a:latin typeface="맑은 고딕"/>
+              </a:rPr>
+              <a:t>① 기록 업로드</a:t>
+            </a:r>
+          </a:p>
+          <a:p>
+            <a:pPr algn="ctr"/>
+            <a:r>
+              <a:rPr sz="1200" b="1">
+                <a:solidFill>
+                  <a:srgbClr val="202020"/>
+                </a:solidFill>
+                <a:latin typeface="맑은 고딕"/>
+              </a:rPr>
+              <a:t>사용자가 CSV 업로드</a:t>
+            </a:r>
+          </a:p>
+        </p:txBody>
+      </p:sp>
+      <p:sp>
+        <p:nvSpPr>
+          <p:cNvPr id="27" name="Right Arrow 26"/>
+          <p:cNvSpPr/>
           <p:nvPr/>
         </p:nvSpPr>
         <p:spPr>
           <a:xfrm>
-            <a:off x="502920" y="292608"/>
-            <a:ext cx="10515600" cy="334137"/>
-          </a:xfrm>
-          <a:prstGeom prst="rect">
+            <a:off x="2395728" y="2606040"/>
+            <a:ext cx="384048" cy="457200"/>
+          </a:xfrm>
+          <a:prstGeom prst="rightArrow">
             <a:avLst/>
           </a:prstGeom>
-          <a:noFill/>
-        </p:spPr>
-        <p:txBody>
-          <a:bodyPr wrap="square">
-            <a:spAutoFit/>
-          </a:bodyPr>
-          <a:lstStyle/>
-          <a:p>
-            <a:pPr algn="l">
-              <a:spcAft>
-                <a:spcPts val="600"/>
-              </a:spcAft>
-              <a:defRPr/>
-            </a:pPr>
-            <a:r>
-              <a:rPr sz="1600" b="1">
-                <a:solidFill>
-                  <a:srgbClr val="2A78D6"/>
-                </a:solidFill>
-                <a:latin typeface="맑은 고딕"/>
-              </a:rPr>
-              <a:t>05. 서비스</a:t>
-            </a:r>
-          </a:p>
-        </p:txBody>
-      </p:sp>
-      <p:sp>
-        <p:nvSpPr>
-          <p:cNvPr id="4" name="TextBox 3"/>
-          <p:cNvSpPr txBox="1"/>
+          <a:solidFill>
+            <a:srgbClr val="B9C3CF"/>
+          </a:solidFill>
+          <a:ln>
+            <a:noFill/>
+          </a:ln>
+        </p:spPr>
+        <p:style>
+          <a:lnRef idx="1">
+            <a:schemeClr val="accent1"/>
+          </a:lnRef>
+          <a:fillRef idx="3">
+            <a:schemeClr val="accent1"/>
+          </a:fillRef>
+          <a:effectRef idx="2">
+            <a:schemeClr val="accent1"/>
+          </a:effectRef>
+          <a:fontRef idx="minor">
+            <a:schemeClr val="lt1"/>
+          </a:fontRef>
+        </p:style>
+        <p:txBody>
+          <a:bodyPr rtlCol="0" anchor="ctr"/>
+          <a:lstStyle/>
+          <a:p>
+            <a:pPr algn="ctr"/>
+          </a:p>
+        </p:txBody>
+      </p:sp>
+      <p:sp>
+        <p:nvSpPr>
+          <p:cNvPr id="28" name="Rounded Rectangle 27"/>
+          <p:cNvSpPr/>
           <p:nvPr/>
         </p:nvSpPr>
         <p:spPr>
           <a:xfrm>
-            <a:off x="502920" y="621792"/>
-            <a:ext cx="11155680" cy="547878"/>
-          </a:xfrm>
-          <a:prstGeom prst="rect">
+            <a:off x="2788920" y="2148840"/>
+            <a:ext cx="1975104" cy="1371600"/>
+          </a:xfrm>
+          <a:prstGeom prst="roundRect">
             <a:avLst/>
           </a:prstGeom>
-          <a:noFill/>
-        </p:spPr>
-        <p:txBody>
-          <a:bodyPr wrap="square">
-            <a:spAutoFit/>
-          </a:bodyPr>
-          <a:lstStyle/>
-          <a:p>
-            <a:pPr algn="l">
-              <a:spcAft>
-                <a:spcPts val="600"/>
-              </a:spcAft>
-              <a:defRPr/>
-            </a:pPr>
-            <a:r>
-              <a:rPr sz="3000" b="1" dirty="0" err="1">
+          <a:solidFill>
+            <a:srgbClr val="EEF3FB"/>
+          </a:solidFill>
+          <a:ln w="25400">
+            <a:solidFill>
+              <a:srgbClr val="2A78D6"/>
+            </a:solidFill>
+          </a:ln>
+        </p:spPr>
+        <p:style>
+          <a:lnRef idx="1">
+            <a:schemeClr val="accent1"/>
+          </a:lnRef>
+          <a:fillRef idx="3">
+            <a:schemeClr val="accent1"/>
+          </a:fillRef>
+          <a:effectRef idx="2">
+            <a:schemeClr val="accent1"/>
+          </a:effectRef>
+          <a:fontRef idx="minor">
+            <a:schemeClr val="lt1"/>
+          </a:fontRef>
+        </p:style>
+        <p:txBody>
+          <a:bodyPr rtlCol="0" anchor="ctr" wrap="square" lIns="54864" rIns="54864"/>
+          <a:lstStyle/>
+          <a:p>
+            <a:pPr algn="ctr"/>
+            <a:r>
+              <a:rPr sz="1550" b="1">
                 <a:solidFill>
                   <a:srgbClr val="104281"/>
                 </a:solidFill>
                 <a:latin typeface="맑은 고딕"/>
               </a:rPr>
-              <a:t>업로드는</a:t>
-            </a:r>
-            <a:r>
-              <a:rPr sz="3000" b="1" dirty="0">
-                <a:solidFill>
-                  <a:srgbClr val="104281"/>
-                </a:solidFill>
-                <a:latin typeface="맑은 고딕"/>
-              </a:rPr>
-              <a:t> </a:t>
-            </a:r>
-            <a:r>
-              <a:rPr sz="3000" b="1" dirty="0" err="1">
-                <a:solidFill>
-                  <a:srgbClr val="104281"/>
-                </a:solidFill>
-                <a:latin typeface="맑은 고딕"/>
-              </a:rPr>
-              <a:t>사라지지</a:t>
-            </a:r>
-            <a:r>
-              <a:rPr sz="3000" b="1" dirty="0">
-                <a:solidFill>
-                  <a:srgbClr val="104281"/>
-                </a:solidFill>
-                <a:latin typeface="맑은 고딕"/>
-              </a:rPr>
-              <a:t> </a:t>
-            </a:r>
-            <a:r>
-              <a:rPr sz="3000" b="1" dirty="0" err="1">
-                <a:solidFill>
-                  <a:srgbClr val="104281"/>
-                </a:solidFill>
-                <a:latin typeface="맑은 고딕"/>
-              </a:rPr>
-              <a:t>않는다</a:t>
-            </a:r>
-            <a:r>
-              <a:rPr sz="3000" b="1" dirty="0">
-                <a:solidFill>
-                  <a:srgbClr val="104281"/>
-                </a:solidFill>
-                <a:latin typeface="맑은 고딕"/>
-              </a:rPr>
-              <a:t> — </a:t>
-            </a:r>
-            <a:r>
-              <a:rPr sz="3000" b="1" dirty="0" err="1">
-                <a:solidFill>
-                  <a:srgbClr val="104281"/>
-                </a:solidFill>
-                <a:latin typeface="맑은 고딕"/>
-              </a:rPr>
-              <a:t>적재·재학습</a:t>
-            </a:r>
-            <a:r>
-              <a:rPr sz="3000" b="1" dirty="0">
-                <a:solidFill>
-                  <a:srgbClr val="104281"/>
-                </a:solidFill>
-                <a:latin typeface="맑은 고딕"/>
-              </a:rPr>
-              <a:t> </a:t>
-            </a:r>
-            <a:r>
-              <a:rPr sz="3000" b="1" dirty="0" err="1">
-                <a:solidFill>
-                  <a:srgbClr val="104281"/>
-                </a:solidFill>
-                <a:latin typeface="맑은 고딕"/>
-              </a:rPr>
-              <a:t>파이프라인</a:t>
-            </a:r>
-            <a:r>
-              <a:rPr sz="3000" b="1" dirty="0">
-                <a:solidFill>
-                  <a:srgbClr val="104281"/>
-                </a:solidFill>
-                <a:latin typeface="맑은 고딕"/>
-              </a:rPr>
-              <a:t> </a:t>
-            </a:r>
-          </a:p>
-        </p:txBody>
-      </p:sp>
-      <p:sp>
-        <p:nvSpPr>
-          <p:cNvPr id="5" name="TextBox 4"/>
-          <p:cNvSpPr txBox="1"/>
+              <a:t>② 예측+자동 적재</a:t>
+            </a:r>
+          </a:p>
+          <a:p>
+            <a:pPr algn="ctr"/>
+            <a:r>
+              <a:rPr sz="1200" b="1">
+                <a:solidFill>
+                  <a:srgbClr val="202020"/>
+                </a:solidFill>
+                <a:latin typeface="맑은 고딕"/>
+              </a:rPr>
+              <a:t>예측과 동시에
+DB 익명 저장</a:t>
+            </a:r>
+          </a:p>
+        </p:txBody>
+      </p:sp>
+      <p:sp>
+        <p:nvSpPr>
+          <p:cNvPr id="29" name="Right Arrow 28"/>
+          <p:cNvSpPr/>
           <p:nvPr/>
         </p:nvSpPr>
         <p:spPr>
           <a:xfrm>
-            <a:off x="914400" y="1656000"/>
-            <a:ext cx="3108960" cy="421005"/>
-          </a:xfrm>
-          <a:prstGeom prst="rect">
+            <a:off x="4773168" y="2606040"/>
+            <a:ext cx="384048" cy="457200"/>
+          </a:xfrm>
+          <a:prstGeom prst="rightArrow">
             <a:avLst/>
           </a:prstGeom>
-          <a:noFill/>
-        </p:spPr>
-        <p:txBody>
-          <a:bodyPr wrap="square">
-            <a:spAutoFit/>
-          </a:bodyPr>
-          <a:lstStyle/>
-          <a:p>
-            <a:pPr algn="l">
-              <a:spcAft>
-                <a:spcPts val="600"/>
-              </a:spcAft>
-              <a:defRPr/>
-            </a:pPr>
-            <a:r>
-              <a:rPr sz="2200" b="1" dirty="0">
-                <a:solidFill>
-                  <a:srgbClr val="104281"/>
-                </a:solidFill>
-                <a:latin typeface="맑은 고딕"/>
-              </a:rPr>
-              <a:t>①  </a:t>
-            </a:r>
-            <a:r>
-              <a:rPr sz="2200" b="1" dirty="0" err="1">
-                <a:solidFill>
-                  <a:srgbClr val="104281"/>
-                </a:solidFill>
-                <a:latin typeface="맑은 고딕"/>
-              </a:rPr>
-              <a:t>업로드</a:t>
-            </a:r>
-            <a:r>
-              <a:rPr sz="2200" b="1" dirty="0">
-                <a:solidFill>
-                  <a:srgbClr val="104281"/>
-                </a:solidFill>
-                <a:latin typeface="맑은 고딕"/>
-              </a:rPr>
-              <a:t> </a:t>
-            </a:r>
-            <a:r>
-              <a:rPr sz="2200" b="1" dirty="0" err="1">
-                <a:solidFill>
-                  <a:srgbClr val="104281"/>
-                </a:solidFill>
-                <a:latin typeface="맑은 고딕"/>
-              </a:rPr>
-              <a:t>자동</a:t>
-            </a:r>
-            <a:r>
-              <a:rPr sz="2200" b="1" dirty="0">
-                <a:solidFill>
-                  <a:srgbClr val="104281"/>
-                </a:solidFill>
-                <a:latin typeface="맑은 고딕"/>
-              </a:rPr>
-              <a:t> </a:t>
-            </a:r>
-            <a:r>
-              <a:rPr sz="2200" b="1" dirty="0" err="1">
-                <a:solidFill>
-                  <a:srgbClr val="104281"/>
-                </a:solidFill>
-                <a:latin typeface="맑은 고딕"/>
-              </a:rPr>
-              <a:t>적재</a:t>
-            </a:r>
-            <a:endParaRPr sz="2200" b="1" dirty="0">
-              <a:solidFill>
-                <a:srgbClr val="104281"/>
-              </a:solidFill>
-              <a:latin typeface="맑은 고딕"/>
-            </a:endParaRPr>
-          </a:p>
-        </p:txBody>
-      </p:sp>
-      <p:sp>
-        <p:nvSpPr>
-          <p:cNvPr id="6" name="TextBox 5"/>
-          <p:cNvSpPr txBox="1"/>
+          <a:solidFill>
+            <a:srgbClr val="B9C3CF"/>
+          </a:solidFill>
+          <a:ln>
+            <a:noFill/>
+          </a:ln>
+        </p:spPr>
+        <p:style>
+          <a:lnRef idx="1">
+            <a:schemeClr val="accent1"/>
+          </a:lnRef>
+          <a:fillRef idx="3">
+            <a:schemeClr val="accent1"/>
+          </a:fillRef>
+          <a:effectRef idx="2">
+            <a:schemeClr val="accent1"/>
+          </a:effectRef>
+          <a:fontRef idx="minor">
+            <a:schemeClr val="lt1"/>
+          </a:fontRef>
+        </p:style>
+        <p:txBody>
+          <a:bodyPr rtlCol="0" anchor="ctr"/>
+          <a:lstStyle/>
+          <a:p>
+            <a:pPr algn="ctr"/>
+          </a:p>
+        </p:txBody>
+      </p:sp>
+      <p:sp>
+        <p:nvSpPr>
+          <p:cNvPr id="30" name="Rounded Rectangle 29"/>
+          <p:cNvSpPr/>
           <p:nvPr/>
         </p:nvSpPr>
         <p:spPr>
           <a:xfrm>
-            <a:off x="4140000" y="1656000"/>
-            <a:ext cx="7589520" cy="717423"/>
-          </a:xfrm>
-          <a:prstGeom prst="rect">
+            <a:off x="5166360" y="2148840"/>
+            <a:ext cx="1975104" cy="1371600"/>
+          </a:xfrm>
+          <a:prstGeom prst="roundRect">
             <a:avLst/>
           </a:prstGeom>
-          <a:noFill/>
-        </p:spPr>
-        <p:txBody>
-          <a:bodyPr wrap="square">
-            <a:spAutoFit/>
-          </a:bodyPr>
-          <a:lstStyle/>
-          <a:p>
-            <a:pPr algn="l">
-              <a:spcAft>
-                <a:spcPts val="600"/>
-              </a:spcAft>
-              <a:defRPr/>
-            </a:pPr>
-            <a:r>
-              <a:rPr b="1" dirty="0" err="1">
-                <a:solidFill>
-                  <a:srgbClr val="202020"/>
-                </a:solidFill>
-                <a:latin typeface="맑은 고딕"/>
-              </a:rPr>
-              <a:t>예측과</a:t>
-            </a:r>
-            <a:r>
-              <a:rPr b="1" dirty="0">
-                <a:solidFill>
-                  <a:srgbClr val="202020"/>
-                </a:solidFill>
-                <a:latin typeface="맑은 고딕"/>
-              </a:rPr>
-              <a:t> </a:t>
-            </a:r>
-            <a:r>
-              <a:rPr b="1" dirty="0" err="1">
-                <a:solidFill>
-                  <a:srgbClr val="202020"/>
-                </a:solidFill>
-                <a:latin typeface="맑은 고딕"/>
-              </a:rPr>
-              <a:t>동시에</a:t>
-            </a:r>
-            <a:r>
-              <a:rPr b="1" dirty="0">
-                <a:solidFill>
-                  <a:srgbClr val="202020"/>
-                </a:solidFill>
-                <a:latin typeface="맑은 고딕"/>
-              </a:rPr>
-              <a:t> </a:t>
-            </a:r>
-            <a:r>
-              <a:rPr b="1" dirty="0" err="1">
-                <a:solidFill>
-                  <a:srgbClr val="202020"/>
-                </a:solidFill>
-                <a:latin typeface="맑은 고딕"/>
-              </a:rPr>
-              <a:t>DB에</a:t>
-            </a:r>
-            <a:r>
-              <a:rPr b="1" dirty="0">
-                <a:solidFill>
-                  <a:srgbClr val="202020"/>
-                </a:solidFill>
-                <a:latin typeface="맑은 고딕"/>
-              </a:rPr>
-              <a:t> </a:t>
-            </a:r>
-            <a:r>
-              <a:rPr b="1" dirty="0" err="1">
-                <a:solidFill>
-                  <a:srgbClr val="202020"/>
-                </a:solidFill>
-                <a:latin typeface="맑은 고딕"/>
-              </a:rPr>
-              <a:t>익명</a:t>
-            </a:r>
-            <a:r>
-              <a:rPr b="1" dirty="0">
-                <a:solidFill>
-                  <a:srgbClr val="202020"/>
-                </a:solidFill>
-                <a:latin typeface="맑은 고딕"/>
-              </a:rPr>
-              <a:t> </a:t>
-            </a:r>
-            <a:r>
-              <a:rPr b="1" dirty="0" err="1">
-                <a:solidFill>
-                  <a:srgbClr val="202020"/>
-                </a:solidFill>
-                <a:latin typeface="맑은 고딕"/>
-              </a:rPr>
-              <a:t>저장</a:t>
-            </a:r>
-            <a:r>
-              <a:rPr lang="en-US" b="1" dirty="0">
-                <a:solidFill>
-                  <a:srgbClr val="202020"/>
-                </a:solidFill>
-                <a:latin typeface="맑은 고딕"/>
-              </a:rPr>
-              <a:t>	</a:t>
-            </a:r>
-            <a:r>
-              <a:rPr b="1" dirty="0">
-                <a:solidFill>
-                  <a:srgbClr val="202020"/>
-                </a:solidFill>
-                <a:latin typeface="맑은 고딕"/>
-              </a:rPr>
-              <a:t>— 일 </a:t>
-            </a:r>
-            <a:r>
-              <a:rPr b="1" dirty="0" err="1">
-                <a:solidFill>
-                  <a:srgbClr val="202020"/>
-                </a:solidFill>
-                <a:latin typeface="맑은 고딕"/>
-              </a:rPr>
-              <a:t>단위</a:t>
-            </a:r>
-            <a:r>
-              <a:rPr b="1" dirty="0">
-                <a:solidFill>
-                  <a:srgbClr val="202020"/>
-                </a:solidFill>
-                <a:latin typeface="맑은 고딕"/>
-              </a:rPr>
-              <a:t> </a:t>
-            </a:r>
-            <a:r>
-              <a:rPr b="1" dirty="0" err="1">
-                <a:solidFill>
-                  <a:srgbClr val="202020"/>
-                </a:solidFill>
-                <a:latin typeface="맑은 고딕"/>
-              </a:rPr>
-              <a:t>기록</a:t>
-            </a:r>
-            <a:r>
-              <a:rPr b="1" dirty="0">
-                <a:solidFill>
-                  <a:srgbClr val="202020"/>
-                </a:solidFill>
-                <a:latin typeface="맑은 고딕"/>
-              </a:rPr>
-              <a:t> + </a:t>
-            </a:r>
-            <a:r>
-              <a:rPr b="1" dirty="0" err="1">
-                <a:solidFill>
-                  <a:srgbClr val="202020"/>
-                </a:solidFill>
-                <a:latin typeface="맑은 고딕"/>
-              </a:rPr>
-              <a:t>예측</a:t>
-            </a:r>
-            <a:r>
-              <a:rPr b="1" dirty="0">
-                <a:solidFill>
-                  <a:srgbClr val="202020"/>
-                </a:solidFill>
-                <a:latin typeface="맑은 고딕"/>
-              </a:rPr>
-              <a:t> </a:t>
-            </a:r>
-            <a:r>
-              <a:rPr b="1" dirty="0" err="1">
-                <a:solidFill>
-                  <a:srgbClr val="202020"/>
-                </a:solidFill>
-                <a:latin typeface="맑은 고딕"/>
-              </a:rPr>
-              <a:t>결과</a:t>
-            </a:r>
-            <a:r>
-              <a:rPr b="1" dirty="0">
-                <a:solidFill>
-                  <a:srgbClr val="202020"/>
-                </a:solidFill>
-                <a:latin typeface="맑은 고딕"/>
-              </a:rPr>
-              <a:t> </a:t>
-            </a:r>
-          </a:p>
-          <a:p>
-            <a:pPr algn="l">
-              <a:spcAft>
-                <a:spcPts val="600"/>
-              </a:spcAft>
-              <a:defRPr/>
-            </a:pPr>
-            <a:r>
-              <a:rPr lang="en-US" b="1" dirty="0">
-                <a:solidFill>
-                  <a:srgbClr val="202020"/>
-                </a:solidFill>
-                <a:latin typeface="맑은 고딕"/>
-              </a:rPr>
-              <a:t>							</a:t>
-            </a:r>
-            <a:r>
-              <a:rPr b="1" dirty="0">
-                <a:solidFill>
-                  <a:srgbClr val="202020"/>
-                </a:solidFill>
-                <a:latin typeface="맑은 고딕"/>
-              </a:rPr>
-              <a:t>(</a:t>
-            </a:r>
-            <a:r>
-              <a:rPr b="1" dirty="0" err="1">
-                <a:solidFill>
-                  <a:srgbClr val="202020"/>
-                </a:solidFill>
-                <a:latin typeface="맑은 고딕"/>
-              </a:rPr>
-              <a:t>개인</a:t>
-            </a:r>
-            <a:r>
-              <a:rPr b="1" dirty="0">
-                <a:solidFill>
-                  <a:srgbClr val="202020"/>
-                </a:solidFill>
-                <a:latin typeface="맑은 고딕"/>
-              </a:rPr>
-              <a:t> </a:t>
-            </a:r>
-            <a:r>
-              <a:rPr b="1" dirty="0" err="1">
-                <a:solidFill>
-                  <a:srgbClr val="202020"/>
-                </a:solidFill>
-                <a:latin typeface="맑은 고딕"/>
-              </a:rPr>
-              <a:t>식별</a:t>
-            </a:r>
-            <a:r>
-              <a:rPr b="1" dirty="0">
-                <a:solidFill>
-                  <a:srgbClr val="202020"/>
-                </a:solidFill>
-                <a:latin typeface="맑은 고딕"/>
-              </a:rPr>
-              <a:t> </a:t>
-            </a:r>
-            <a:r>
-              <a:rPr b="1" dirty="0" err="1">
-                <a:solidFill>
-                  <a:srgbClr val="202020"/>
-                </a:solidFill>
-                <a:latin typeface="맑은 고딕"/>
-              </a:rPr>
-              <a:t>정보</a:t>
-            </a:r>
-            <a:r>
-              <a:rPr b="1" dirty="0">
-                <a:solidFill>
-                  <a:srgbClr val="202020"/>
-                </a:solidFill>
-                <a:latin typeface="맑은 고딕"/>
-              </a:rPr>
-              <a:t> </a:t>
-            </a:r>
-            <a:r>
-              <a:rPr b="1" dirty="0" err="1">
-                <a:solidFill>
-                  <a:srgbClr val="202020"/>
-                </a:solidFill>
-                <a:latin typeface="맑은 고딕"/>
-              </a:rPr>
-              <a:t>없음</a:t>
-            </a:r>
-            <a:r>
-              <a:rPr b="1" dirty="0">
-                <a:solidFill>
-                  <a:srgbClr val="202020"/>
-                </a:solidFill>
-                <a:latin typeface="맑은 고딕"/>
-              </a:rPr>
-              <a:t>)</a:t>
-            </a:r>
-          </a:p>
-        </p:txBody>
-      </p:sp>
-      <p:sp>
-        <p:nvSpPr>
-          <p:cNvPr id="7" name="TextBox 6"/>
-          <p:cNvSpPr txBox="1"/>
+          <a:solidFill>
+            <a:srgbClr val="EEF3FB"/>
+          </a:solidFill>
+          <a:ln w="25400">
+            <a:solidFill>
+              <a:srgbClr val="2A78D6"/>
+            </a:solidFill>
+          </a:ln>
+        </p:spPr>
+        <p:style>
+          <a:lnRef idx="1">
+            <a:schemeClr val="accent1"/>
+          </a:lnRef>
+          <a:fillRef idx="3">
+            <a:schemeClr val="accent1"/>
+          </a:fillRef>
+          <a:effectRef idx="2">
+            <a:schemeClr val="accent1"/>
+          </a:effectRef>
+          <a:fontRef idx="minor">
+            <a:schemeClr val="lt1"/>
+          </a:fontRef>
+        </p:style>
+        <p:txBody>
+          <a:bodyPr rtlCol="0" anchor="ctr" wrap="square" lIns="54864" rIns="54864"/>
+          <a:lstStyle/>
+          <a:p>
+            <a:pPr algn="ctr"/>
+            <a:r>
+              <a:rPr sz="1550" b="1">
+                <a:solidFill>
+                  <a:srgbClr val="104281"/>
+                </a:solidFill>
+                <a:latin typeface="맑은 고딕"/>
+              </a:rPr>
+              <a:t>③ 확진 라벨 연결</a:t>
+            </a:r>
+          </a:p>
+          <a:p>
+            <a:pPr algn="ctr"/>
+            <a:r>
+              <a:rPr sz="1200" b="1">
+                <a:solidFill>
+                  <a:srgbClr val="202020"/>
+                </a:solidFill>
+                <a:latin typeface="맑은 고딕"/>
+              </a:rPr>
+              <a:t>기관이 검진 결과 입력</a:t>
+            </a:r>
+          </a:p>
+        </p:txBody>
+      </p:sp>
+      <p:sp>
+        <p:nvSpPr>
+          <p:cNvPr id="31" name="Right Arrow 30"/>
+          <p:cNvSpPr/>
           <p:nvPr/>
         </p:nvSpPr>
         <p:spPr>
           <a:xfrm>
-            <a:off x="914400" y="2520000"/>
-            <a:ext cx="3108960" cy="424815"/>
-          </a:xfrm>
-          <a:prstGeom prst="rect">
+            <a:off x="7150608" y="2606040"/>
+            <a:ext cx="384048" cy="457200"/>
+          </a:xfrm>
+          <a:prstGeom prst="rightArrow">
             <a:avLst/>
           </a:prstGeom>
-          <a:noFill/>
-        </p:spPr>
-        <p:txBody>
-          <a:bodyPr wrap="square">
-            <a:spAutoFit/>
-          </a:bodyPr>
-          <a:lstStyle/>
-          <a:p>
-            <a:pPr algn="l">
-              <a:spcAft>
-                <a:spcPts val="600"/>
-              </a:spcAft>
-              <a:defRPr/>
-            </a:pPr>
-            <a:r>
-              <a:rPr sz="2200" b="1" dirty="0">
-                <a:solidFill>
-                  <a:srgbClr val="104281"/>
-                </a:solidFill>
-                <a:latin typeface="맑은 고딕"/>
-              </a:rPr>
-              <a:t>②  </a:t>
-            </a:r>
-            <a:r>
-              <a:rPr sz="2200" b="1" dirty="0" err="1">
-                <a:solidFill>
-                  <a:srgbClr val="104281"/>
-                </a:solidFill>
-                <a:latin typeface="맑은 고딕"/>
-              </a:rPr>
-              <a:t>검진</a:t>
-            </a:r>
-            <a:r>
-              <a:rPr sz="2200" b="1" dirty="0">
-                <a:solidFill>
-                  <a:srgbClr val="104281"/>
-                </a:solidFill>
-                <a:latin typeface="맑은 고딕"/>
-              </a:rPr>
-              <a:t> </a:t>
-            </a:r>
-            <a:r>
-              <a:rPr sz="2200" b="1" dirty="0" err="1">
-                <a:solidFill>
-                  <a:srgbClr val="104281"/>
-                </a:solidFill>
-                <a:latin typeface="맑은 고딕"/>
-              </a:rPr>
-              <a:t>결과</a:t>
-            </a:r>
-            <a:r>
-              <a:rPr sz="2200" b="1" dirty="0">
-                <a:solidFill>
-                  <a:srgbClr val="104281"/>
-                </a:solidFill>
-                <a:latin typeface="맑은 고딕"/>
-              </a:rPr>
-              <a:t> </a:t>
-            </a:r>
-            <a:r>
-              <a:rPr sz="2200" b="1" dirty="0" err="1">
-                <a:solidFill>
-                  <a:srgbClr val="104281"/>
-                </a:solidFill>
-                <a:latin typeface="맑은 고딕"/>
-              </a:rPr>
-              <a:t>연결</a:t>
-            </a:r>
-            <a:endParaRPr sz="2200" b="1" dirty="0">
-              <a:solidFill>
-                <a:srgbClr val="104281"/>
-              </a:solidFill>
-              <a:latin typeface="맑은 고딕"/>
-            </a:endParaRPr>
-          </a:p>
-        </p:txBody>
-      </p:sp>
-      <p:sp>
-        <p:nvSpPr>
-          <p:cNvPr id="8" name="TextBox 7"/>
-          <p:cNvSpPr txBox="1"/>
+          <a:solidFill>
+            <a:srgbClr val="B9C3CF"/>
+          </a:solidFill>
+          <a:ln>
+            <a:noFill/>
+          </a:ln>
+        </p:spPr>
+        <p:style>
+          <a:lnRef idx="1">
+            <a:schemeClr val="accent1"/>
+          </a:lnRef>
+          <a:fillRef idx="3">
+            <a:schemeClr val="accent1"/>
+          </a:fillRef>
+          <a:effectRef idx="2">
+            <a:schemeClr val="accent1"/>
+          </a:effectRef>
+          <a:fontRef idx="minor">
+            <a:schemeClr val="lt1"/>
+          </a:fontRef>
+        </p:style>
+        <p:txBody>
+          <a:bodyPr rtlCol="0" anchor="ctr"/>
+          <a:lstStyle/>
+          <a:p>
+            <a:pPr algn="ctr"/>
+          </a:p>
+        </p:txBody>
+      </p:sp>
+      <p:sp>
+        <p:nvSpPr>
+          <p:cNvPr id="32" name="Rounded Rectangle 31"/>
+          <p:cNvSpPr/>
           <p:nvPr/>
         </p:nvSpPr>
         <p:spPr>
           <a:xfrm>
-            <a:off x="4140000" y="2520000"/>
-            <a:ext cx="7589520" cy="723275"/>
-          </a:xfrm>
-          <a:prstGeom prst="rect">
+            <a:off x="7543800" y="2148840"/>
+            <a:ext cx="1975104" cy="1371600"/>
+          </a:xfrm>
+          <a:prstGeom prst="roundRect">
             <a:avLst/>
           </a:prstGeom>
-          <a:noFill/>
-        </p:spPr>
-        <p:txBody>
-          <a:bodyPr wrap="square">
-            <a:spAutoFit/>
-          </a:bodyPr>
-          <a:lstStyle/>
-          <a:p>
-            <a:pPr algn="l">
-              <a:spcAft>
-                <a:spcPts val="600"/>
-              </a:spcAft>
-              <a:defRPr/>
-            </a:pPr>
-            <a:r>
-              <a:rPr b="1" dirty="0" err="1">
-                <a:solidFill>
-                  <a:srgbClr val="202020"/>
-                </a:solidFill>
-                <a:latin typeface="맑은 고딕"/>
-              </a:rPr>
-              <a:t>위험군</a:t>
-            </a:r>
-            <a:r>
-              <a:rPr b="1" dirty="0">
-                <a:solidFill>
-                  <a:srgbClr val="202020"/>
-                </a:solidFill>
-                <a:latin typeface="맑은 고딕"/>
-              </a:rPr>
-              <a:t> </a:t>
-            </a:r>
-            <a:r>
-              <a:rPr b="1" dirty="0" err="1">
-                <a:solidFill>
-                  <a:srgbClr val="202020"/>
-                </a:solidFill>
-                <a:latin typeface="맑은 고딕"/>
-              </a:rPr>
-              <a:t>안내를</a:t>
-            </a:r>
-            <a:r>
-              <a:rPr b="1" dirty="0">
-                <a:solidFill>
-                  <a:srgbClr val="202020"/>
-                </a:solidFill>
-                <a:latin typeface="맑은 고딕"/>
-              </a:rPr>
-              <a:t> </a:t>
-            </a:r>
-            <a:r>
-              <a:rPr b="1" dirty="0" err="1">
-                <a:solidFill>
-                  <a:srgbClr val="202020"/>
-                </a:solidFill>
-                <a:latin typeface="맑은 고딕"/>
-              </a:rPr>
-              <a:t>받고</a:t>
-            </a:r>
-            <a:r>
-              <a:rPr b="1" dirty="0">
-                <a:solidFill>
-                  <a:srgbClr val="202020"/>
-                </a:solidFill>
-                <a:latin typeface="맑은 고딕"/>
-              </a:rPr>
-              <a:t> </a:t>
-            </a:r>
-            <a:r>
-              <a:rPr b="1" dirty="0" err="1">
-                <a:solidFill>
-                  <a:srgbClr val="202020"/>
-                </a:solidFill>
-                <a:latin typeface="맑은 고딕"/>
-              </a:rPr>
-              <a:t>검진한</a:t>
-            </a:r>
-            <a:r>
-              <a:rPr b="1" dirty="0">
-                <a:solidFill>
-                  <a:srgbClr val="202020"/>
-                </a:solidFill>
-                <a:latin typeface="맑은 고딕"/>
-              </a:rPr>
-              <a:t> </a:t>
-            </a:r>
-            <a:r>
-              <a:rPr b="1" dirty="0" err="1">
-                <a:solidFill>
-                  <a:srgbClr val="202020"/>
-                </a:solidFill>
-                <a:latin typeface="맑은 고딕"/>
-              </a:rPr>
-              <a:t>사용자의</a:t>
-            </a:r>
-            <a:r>
-              <a:rPr b="1" dirty="0">
-                <a:solidFill>
-                  <a:srgbClr val="202020"/>
-                </a:solidFill>
-                <a:latin typeface="맑은 고딕"/>
-              </a:rPr>
-              <a:t> </a:t>
-            </a:r>
-            <a:r>
-              <a:rPr b="1" dirty="0" err="1">
-                <a:solidFill>
-                  <a:srgbClr val="202020"/>
-                </a:solidFill>
-                <a:latin typeface="맑은 고딕"/>
-              </a:rPr>
-              <a:t>확진</a:t>
-            </a:r>
-            <a:r>
-              <a:rPr b="1" dirty="0">
-                <a:solidFill>
-                  <a:srgbClr val="202020"/>
-                </a:solidFill>
-                <a:latin typeface="맑은 고딕"/>
-              </a:rPr>
-              <a:t> </a:t>
-            </a:r>
-            <a:r>
-              <a:rPr b="1" dirty="0" err="1">
-                <a:solidFill>
-                  <a:srgbClr val="202020"/>
-                </a:solidFill>
-                <a:latin typeface="맑은 고딕"/>
-              </a:rPr>
-              <a:t>결과를</a:t>
-            </a:r>
-            <a:r>
-              <a:rPr b="1" dirty="0">
-                <a:solidFill>
-                  <a:srgbClr val="202020"/>
-                </a:solidFill>
-                <a:latin typeface="맑은 고딕"/>
-              </a:rPr>
-              <a:t> </a:t>
-            </a:r>
-            <a:r>
-              <a:rPr b="1" dirty="0" err="1">
-                <a:solidFill>
-                  <a:srgbClr val="202020"/>
-                </a:solidFill>
-                <a:latin typeface="맑은 고딕"/>
-              </a:rPr>
-              <a:t>기관이</a:t>
-            </a:r>
-            <a:r>
-              <a:rPr b="1" dirty="0">
-                <a:solidFill>
-                  <a:srgbClr val="202020"/>
-                </a:solidFill>
-                <a:latin typeface="맑은 고딕"/>
-              </a:rPr>
-              <a:t> </a:t>
-            </a:r>
-            <a:r>
-              <a:rPr b="1" dirty="0" err="1">
-                <a:solidFill>
-                  <a:srgbClr val="202020"/>
-                </a:solidFill>
-                <a:latin typeface="맑은 고딕"/>
-              </a:rPr>
-              <a:t>입력</a:t>
-            </a:r>
-            <a:r>
-              <a:rPr b="1" dirty="0">
-                <a:solidFill>
-                  <a:srgbClr val="202020"/>
-                </a:solidFill>
-                <a:latin typeface="맑은 고딕"/>
-              </a:rPr>
-              <a:t> </a:t>
-            </a:r>
-          </a:p>
-          <a:p>
-            <a:pPr algn="l">
-              <a:spcAft>
-                <a:spcPts val="600"/>
-              </a:spcAft>
-              <a:defRPr/>
-            </a:pPr>
-            <a:r>
-              <a:rPr lang="en-US" b="1" dirty="0">
-                <a:solidFill>
-                  <a:srgbClr val="202020"/>
-                </a:solidFill>
-                <a:latin typeface="맑은 고딕"/>
-              </a:rPr>
-              <a:t>							</a:t>
-            </a:r>
-            <a:r>
-              <a:rPr b="1" dirty="0">
-                <a:solidFill>
-                  <a:srgbClr val="202020"/>
-                </a:solidFill>
-                <a:latin typeface="맑은 고딕"/>
-              </a:rPr>
-              <a:t>(API </a:t>
-            </a:r>
-            <a:r>
-              <a:rPr b="1" dirty="0" err="1">
-                <a:solidFill>
-                  <a:srgbClr val="202020"/>
-                </a:solidFill>
-                <a:latin typeface="맑은 고딕"/>
-              </a:rPr>
-              <a:t>구현</a:t>
-            </a:r>
-            <a:r>
-              <a:rPr b="1" dirty="0">
-                <a:solidFill>
-                  <a:srgbClr val="202020"/>
-                </a:solidFill>
-                <a:latin typeface="맑은 고딕"/>
-              </a:rPr>
-              <a:t>)</a:t>
-            </a:r>
-          </a:p>
-        </p:txBody>
-      </p:sp>
-      <p:sp>
-        <p:nvSpPr>
-          <p:cNvPr id="9" name="TextBox 8"/>
-          <p:cNvSpPr txBox="1"/>
+          <a:solidFill>
+            <a:srgbClr val="EEF3FB"/>
+          </a:solidFill>
+          <a:ln w="25400">
+            <a:solidFill>
+              <a:srgbClr val="2A78D6"/>
+            </a:solidFill>
+          </a:ln>
+        </p:spPr>
+        <p:style>
+          <a:lnRef idx="1">
+            <a:schemeClr val="accent1"/>
+          </a:lnRef>
+          <a:fillRef idx="3">
+            <a:schemeClr val="accent1"/>
+          </a:fillRef>
+          <a:effectRef idx="2">
+            <a:schemeClr val="accent1"/>
+          </a:effectRef>
+          <a:fontRef idx="minor">
+            <a:schemeClr val="lt1"/>
+          </a:fontRef>
+        </p:style>
+        <p:txBody>
+          <a:bodyPr rtlCol="0" anchor="ctr" wrap="square" lIns="54864" rIns="54864"/>
+          <a:lstStyle/>
+          <a:p>
+            <a:pPr algn="ctr"/>
+            <a:r>
+              <a:rPr sz="1550" b="1">
+                <a:solidFill>
+                  <a:srgbClr val="104281"/>
+                </a:solidFill>
+                <a:latin typeface="맑은 고딕"/>
+              </a:rPr>
+              <a:t>④ 재학습</a:t>
+            </a:r>
+          </a:p>
+          <a:p>
+            <a:pPr algn="ctr"/>
+            <a:r>
+              <a:rPr sz="1200" b="1">
+                <a:solidFill>
+                  <a:srgbClr val="202020"/>
+                </a:solidFill>
+                <a:latin typeface="맑은 고딕"/>
+              </a:rPr>
+              <a:t>라벨 데이터만
+기존 174명과 결합</a:t>
+            </a:r>
+          </a:p>
+        </p:txBody>
+      </p:sp>
+      <p:sp>
+        <p:nvSpPr>
+          <p:cNvPr id="33" name="Right Arrow 32"/>
+          <p:cNvSpPr/>
           <p:nvPr/>
         </p:nvSpPr>
         <p:spPr>
           <a:xfrm>
-            <a:off x="914400" y="3384000"/>
-            <a:ext cx="3108960" cy="419100"/>
-          </a:xfrm>
-          <a:prstGeom prst="rect">
+            <a:off x="9528048" y="2606040"/>
+            <a:ext cx="384048" cy="457200"/>
+          </a:xfrm>
+          <a:prstGeom prst="rightArrow">
             <a:avLst/>
           </a:prstGeom>
-          <a:noFill/>
-        </p:spPr>
-        <p:txBody>
-          <a:bodyPr wrap="square">
-            <a:spAutoFit/>
-          </a:bodyPr>
-          <a:lstStyle/>
-          <a:p>
-            <a:pPr algn="l">
-              <a:spcAft>
-                <a:spcPts val="600"/>
-              </a:spcAft>
-              <a:defRPr/>
-            </a:pPr>
-            <a:r>
-              <a:rPr sz="2200" b="1">
-                <a:solidFill>
-                  <a:srgbClr val="104281"/>
-                </a:solidFill>
-                <a:latin typeface="맑은 고딕"/>
-              </a:rPr>
-              <a:t>③  재학습</a:t>
-            </a:r>
-          </a:p>
-        </p:txBody>
-      </p:sp>
-      <p:sp>
-        <p:nvSpPr>
-          <p:cNvPr id="10" name="TextBox 9"/>
-          <p:cNvSpPr txBox="1"/>
+          <a:solidFill>
+            <a:srgbClr val="B9C3CF"/>
+          </a:solidFill>
+          <a:ln>
+            <a:noFill/>
+          </a:ln>
+        </p:spPr>
+        <p:style>
+          <a:lnRef idx="1">
+            <a:schemeClr val="accent1"/>
+          </a:lnRef>
+          <a:fillRef idx="3">
+            <a:schemeClr val="accent1"/>
+          </a:fillRef>
+          <a:effectRef idx="2">
+            <a:schemeClr val="accent1"/>
+          </a:effectRef>
+          <a:fontRef idx="minor">
+            <a:schemeClr val="lt1"/>
+          </a:fontRef>
+        </p:style>
+        <p:txBody>
+          <a:bodyPr rtlCol="0" anchor="ctr"/>
+          <a:lstStyle/>
+          <a:p>
+            <a:pPr algn="ctr"/>
+          </a:p>
+        </p:txBody>
+      </p:sp>
+      <p:sp>
+        <p:nvSpPr>
+          <p:cNvPr id="34" name="Rounded Rectangle 33"/>
+          <p:cNvSpPr/>
           <p:nvPr/>
         </p:nvSpPr>
         <p:spPr>
           <a:xfrm>
-            <a:off x="4140000" y="3384000"/>
-            <a:ext cx="7589520" cy="723275"/>
-          </a:xfrm>
-          <a:prstGeom prst="rect">
+            <a:off x="9921240" y="2148840"/>
+            <a:ext cx="1975104" cy="1371600"/>
+          </a:xfrm>
+          <a:prstGeom prst="roundRect">
             <a:avLst/>
           </a:prstGeom>
-          <a:noFill/>
-        </p:spPr>
-        <p:txBody>
-          <a:bodyPr wrap="square">
-            <a:spAutoFit/>
-          </a:bodyPr>
-          <a:lstStyle/>
-          <a:p>
-            <a:pPr algn="l">
-              <a:spcAft>
-                <a:spcPts val="600"/>
-              </a:spcAft>
-              <a:defRPr/>
-            </a:pPr>
-            <a:r>
-              <a:rPr b="1" dirty="0" err="1">
-                <a:solidFill>
-                  <a:srgbClr val="202020"/>
-                </a:solidFill>
-                <a:latin typeface="맑은 고딕"/>
-              </a:rPr>
-              <a:t>확진</a:t>
-            </a:r>
-            <a:r>
-              <a:rPr b="1" dirty="0">
-                <a:solidFill>
-                  <a:srgbClr val="202020"/>
-                </a:solidFill>
-                <a:latin typeface="맑은 고딕"/>
-              </a:rPr>
-              <a:t> </a:t>
-            </a:r>
-            <a:r>
-              <a:rPr b="1" dirty="0" err="1">
-                <a:solidFill>
-                  <a:srgbClr val="202020"/>
-                </a:solidFill>
-                <a:latin typeface="맑은 고딕"/>
-              </a:rPr>
-              <a:t>라벨이</a:t>
-            </a:r>
-            <a:r>
-              <a:rPr b="1" dirty="0">
-                <a:solidFill>
-                  <a:srgbClr val="202020"/>
-                </a:solidFill>
-                <a:latin typeface="맑은 고딕"/>
-              </a:rPr>
-              <a:t> </a:t>
-            </a:r>
-            <a:r>
-              <a:rPr b="1" dirty="0" err="1">
-                <a:solidFill>
-                  <a:srgbClr val="202020"/>
-                </a:solidFill>
-                <a:latin typeface="맑은 고딕"/>
-              </a:rPr>
-              <a:t>붙은</a:t>
-            </a:r>
-            <a:r>
-              <a:rPr b="1" dirty="0">
-                <a:solidFill>
-                  <a:srgbClr val="202020"/>
-                </a:solidFill>
-                <a:latin typeface="맑은 고딕"/>
-              </a:rPr>
-              <a:t> </a:t>
-            </a:r>
-            <a:r>
-              <a:rPr b="1" dirty="0" err="1">
-                <a:solidFill>
-                  <a:srgbClr val="202020"/>
-                </a:solidFill>
-                <a:latin typeface="맑은 고딕"/>
-              </a:rPr>
-              <a:t>데이터만</a:t>
-            </a:r>
-            <a:r>
-              <a:rPr b="1" dirty="0">
-                <a:solidFill>
-                  <a:srgbClr val="202020"/>
-                </a:solidFill>
-                <a:latin typeface="맑은 고딕"/>
-              </a:rPr>
-              <a:t> </a:t>
-            </a:r>
-            <a:r>
-              <a:rPr b="1" dirty="0" err="1">
-                <a:solidFill>
-                  <a:srgbClr val="202020"/>
-                </a:solidFill>
-                <a:latin typeface="맑은 고딕"/>
-              </a:rPr>
-              <a:t>기존</a:t>
-            </a:r>
-            <a:r>
-              <a:rPr b="1" dirty="0">
-                <a:solidFill>
-                  <a:srgbClr val="202020"/>
-                </a:solidFill>
-                <a:latin typeface="맑은 고딕"/>
-              </a:rPr>
-              <a:t> 174명과 </a:t>
-            </a:r>
-            <a:r>
-              <a:rPr b="1" dirty="0" err="1">
-                <a:solidFill>
-                  <a:srgbClr val="202020"/>
-                </a:solidFill>
-                <a:latin typeface="맑은 고딕"/>
-              </a:rPr>
-              <a:t>결합</a:t>
-            </a:r>
-            <a:r>
-              <a:rPr b="1" dirty="0">
-                <a:solidFill>
-                  <a:srgbClr val="202020"/>
-                </a:solidFill>
-                <a:latin typeface="맑은 고딕"/>
-              </a:rPr>
-              <a:t> </a:t>
-            </a:r>
-          </a:p>
-          <a:p>
-            <a:pPr algn="l">
-              <a:spcAft>
-                <a:spcPts val="600"/>
-              </a:spcAft>
-              <a:defRPr/>
-            </a:pPr>
-            <a:r>
-              <a:rPr lang="en-US" b="1" dirty="0">
-                <a:solidFill>
-                  <a:srgbClr val="202020"/>
-                </a:solidFill>
-                <a:latin typeface="맑은 고딕"/>
-              </a:rPr>
-              <a:t>							</a:t>
-            </a:r>
-            <a:r>
-              <a:rPr b="1" dirty="0">
-                <a:solidFill>
-                  <a:srgbClr val="202020"/>
-                </a:solidFill>
-                <a:latin typeface="맑은 고딕"/>
-              </a:rPr>
-              <a:t>— </a:t>
-            </a:r>
-            <a:r>
-              <a:rPr b="1" dirty="0" err="1">
-                <a:solidFill>
-                  <a:srgbClr val="202020"/>
-                </a:solidFill>
-                <a:latin typeface="맑은 고딕"/>
-              </a:rPr>
-              <a:t>같은</a:t>
-            </a:r>
-            <a:r>
-              <a:rPr b="1" dirty="0">
-                <a:solidFill>
-                  <a:srgbClr val="202020"/>
-                </a:solidFill>
-                <a:latin typeface="맑은 고딕"/>
-              </a:rPr>
-              <a:t> </a:t>
-            </a:r>
-            <a:r>
-              <a:rPr b="1" dirty="0" err="1">
-                <a:solidFill>
-                  <a:srgbClr val="202020"/>
-                </a:solidFill>
-                <a:latin typeface="맑은 고딕"/>
-              </a:rPr>
-              <a:t>무누수</a:t>
-            </a:r>
-            <a:r>
-              <a:rPr b="1" dirty="0">
-                <a:solidFill>
-                  <a:srgbClr val="202020"/>
-                </a:solidFill>
-                <a:latin typeface="맑은 고딕"/>
-              </a:rPr>
-              <a:t> </a:t>
-            </a:r>
-            <a:r>
-              <a:rPr b="1" dirty="0" err="1">
-                <a:solidFill>
-                  <a:srgbClr val="202020"/>
-                </a:solidFill>
-                <a:latin typeface="맑은 고딕"/>
-              </a:rPr>
-              <a:t>검증</a:t>
-            </a:r>
-            <a:r>
-              <a:rPr b="1" dirty="0">
-                <a:solidFill>
-                  <a:srgbClr val="202020"/>
-                </a:solidFill>
-                <a:latin typeface="맑은 고딕"/>
-              </a:rPr>
-              <a:t> </a:t>
-            </a:r>
-            <a:r>
-              <a:rPr b="1" dirty="0" err="1">
-                <a:solidFill>
-                  <a:srgbClr val="202020"/>
-                </a:solidFill>
-                <a:latin typeface="맑은 고딕"/>
-              </a:rPr>
-              <a:t>절차로</a:t>
-            </a:r>
-            <a:r>
-              <a:rPr b="1" dirty="0">
-                <a:solidFill>
-                  <a:srgbClr val="202020"/>
-                </a:solidFill>
-                <a:latin typeface="맑은 고딕"/>
-              </a:rPr>
-              <a:t> </a:t>
-            </a:r>
-            <a:r>
-              <a:rPr b="1" dirty="0" err="1">
-                <a:solidFill>
-                  <a:srgbClr val="202020"/>
-                </a:solidFill>
-                <a:latin typeface="맑은 고딕"/>
-              </a:rPr>
-              <a:t>재학습</a:t>
-            </a:r>
-            <a:endParaRPr b="1" dirty="0">
-              <a:solidFill>
-                <a:srgbClr val="202020"/>
-              </a:solidFill>
-              <a:latin typeface="맑은 고딕"/>
-            </a:endParaRPr>
-          </a:p>
-        </p:txBody>
-      </p:sp>
-      <p:sp>
-        <p:nvSpPr>
-          <p:cNvPr id="11" name="TextBox 10"/>
-          <p:cNvSpPr txBox="1"/>
+          <a:solidFill>
+            <a:srgbClr val="E7F3EA"/>
+          </a:solidFill>
+          <a:ln w="25400">
+            <a:solidFill>
+              <a:srgbClr val="2E7D43"/>
+            </a:solidFill>
+          </a:ln>
+        </p:spPr>
+        <p:style>
+          <a:lnRef idx="1">
+            <a:schemeClr val="accent1"/>
+          </a:lnRef>
+          <a:fillRef idx="3">
+            <a:schemeClr val="accent1"/>
+          </a:fillRef>
+          <a:effectRef idx="2">
+            <a:schemeClr val="accent1"/>
+          </a:effectRef>
+          <a:fontRef idx="minor">
+            <a:schemeClr val="lt1"/>
+          </a:fontRef>
+        </p:style>
+        <p:txBody>
+          <a:bodyPr rtlCol="0" anchor="ctr" wrap="square" lIns="54864" rIns="54864"/>
+          <a:lstStyle/>
+          <a:p>
+            <a:pPr algn="ctr"/>
+            <a:r>
+              <a:rPr sz="1550" b="1">
+                <a:solidFill>
+                  <a:srgbClr val="2E7D43"/>
+                </a:solidFill>
+                <a:latin typeface="맑은 고딕"/>
+              </a:rPr>
+              <a:t>⑤ 모델 교체</a:t>
+            </a:r>
+          </a:p>
+          <a:p>
+            <a:pPr algn="ctr"/>
+            <a:r>
+              <a:rPr sz="1200" b="1">
+                <a:solidFill>
+                  <a:srgbClr val="202020"/>
+                </a:solidFill>
+                <a:latin typeface="맑은 고딕"/>
+              </a:rPr>
+              <a:t>백업 후 교체
+→ 서비스 반영</a:t>
+            </a:r>
+          </a:p>
+        </p:txBody>
+      </p:sp>
+      <p:sp>
+        <p:nvSpPr>
+          <p:cNvPr id="35" name="Left Arrow 34"/>
+          <p:cNvSpPr/>
           <p:nvPr/>
         </p:nvSpPr>
         <p:spPr>
           <a:xfrm>
-            <a:off x="914400" y="4248000"/>
-            <a:ext cx="3108960" cy="422910"/>
-          </a:xfrm>
-          <a:prstGeom prst="rect">
+            <a:off x="2788920" y="3931920"/>
+            <a:ext cx="7680960" cy="457200"/>
+          </a:xfrm>
+          <a:prstGeom prst="leftArrow">
             <a:avLst/>
           </a:prstGeom>
-          <a:noFill/>
-        </p:spPr>
-        <p:txBody>
-          <a:bodyPr wrap="square">
-            <a:spAutoFit/>
-          </a:bodyPr>
-          <a:lstStyle/>
-          <a:p>
-            <a:pPr algn="l">
-              <a:spcAft>
-                <a:spcPts val="600"/>
-              </a:spcAft>
-              <a:defRPr/>
-            </a:pPr>
-            <a:r>
-              <a:rPr sz="2200" b="1" dirty="0">
+          <a:solidFill>
+            <a:srgbClr val="DCE8F8"/>
+          </a:solidFill>
+          <a:ln w="19050">
+            <a:solidFill>
+              <a:srgbClr val="2A78D6"/>
+            </a:solidFill>
+          </a:ln>
+        </p:spPr>
+        <p:style>
+          <a:lnRef idx="1">
+            <a:schemeClr val="accent1"/>
+          </a:lnRef>
+          <a:fillRef idx="3">
+            <a:schemeClr val="accent1"/>
+          </a:fillRef>
+          <a:effectRef idx="2">
+            <a:schemeClr val="accent1"/>
+          </a:effectRef>
+          <a:fontRef idx="minor">
+            <a:schemeClr val="lt1"/>
+          </a:fontRef>
+        </p:style>
+        <p:txBody>
+          <a:bodyPr rtlCol="0" anchor="ctr"/>
+          <a:lstStyle/>
+          <a:p>
+            <a:pPr algn="ctr"/>
+            <a:r>
+              <a:rPr sz="1400" b="1">
                 <a:solidFill>
                   <a:srgbClr val="104281"/>
                 </a:solidFill>
                 <a:latin typeface="맑은 고딕"/>
               </a:rPr>
-              <a:t>④  </a:t>
-            </a:r>
-            <a:r>
-              <a:rPr sz="2200" b="1" dirty="0" err="1">
-                <a:solidFill>
-                  <a:srgbClr val="104281"/>
-                </a:solidFill>
-                <a:latin typeface="맑은 고딕"/>
-              </a:rPr>
-              <a:t>모델</a:t>
-            </a:r>
-            <a:r>
-              <a:rPr sz="2200" b="1" dirty="0">
-                <a:solidFill>
-                  <a:srgbClr val="104281"/>
-                </a:solidFill>
-                <a:latin typeface="맑은 고딕"/>
-              </a:rPr>
-              <a:t> </a:t>
-            </a:r>
-            <a:r>
-              <a:rPr sz="2200" b="1" dirty="0" err="1">
-                <a:solidFill>
-                  <a:srgbClr val="104281"/>
-                </a:solidFill>
-                <a:latin typeface="맑은 고딕"/>
-              </a:rPr>
-              <a:t>교체</a:t>
-            </a:r>
-            <a:endParaRPr sz="2200" b="1" dirty="0">
-              <a:solidFill>
-                <a:srgbClr val="104281"/>
-              </a:solidFill>
-              <a:latin typeface="맑은 고딕"/>
-            </a:endParaRPr>
-          </a:p>
-        </p:txBody>
-      </p:sp>
-      <p:sp>
-        <p:nvSpPr>
-          <p:cNvPr id="12" name="TextBox 11"/>
-          <p:cNvSpPr txBox="1"/>
-          <p:nvPr/>
-        </p:nvSpPr>
-        <p:spPr>
-          <a:xfrm>
-            <a:off x="4140000" y="4248000"/>
-            <a:ext cx="7589520" cy="366903"/>
-          </a:xfrm>
-          <a:prstGeom prst="rect">
-            <a:avLst/>
-          </a:prstGeom>
-          <a:noFill/>
-        </p:spPr>
-        <p:txBody>
-          <a:bodyPr wrap="square">
-            <a:spAutoFit/>
-          </a:bodyPr>
-          <a:lstStyle/>
-          <a:p>
-            <a:pPr algn="l">
-              <a:spcAft>
-                <a:spcPts val="600"/>
-              </a:spcAft>
-              <a:defRPr/>
-            </a:pPr>
-            <a:r>
-              <a:rPr b="1">
-                <a:solidFill>
-                  <a:srgbClr val="202020"/>
-                </a:solidFill>
-                <a:latin typeface="맑은 고딕"/>
-              </a:rPr>
-              <a:t>기존 모델 자동 백업 후 교체 → 서비스 재시작만 하면 새 모델 적용</a:t>
-            </a:r>
-          </a:p>
-        </p:txBody>
-      </p:sp>
-      <p:sp>
-        <p:nvSpPr>
-          <p:cNvPr id="13" name="TextBox 12"/>
-          <p:cNvSpPr txBox="1"/>
-          <p:nvPr/>
-        </p:nvSpPr>
-        <p:spPr>
-          <a:xfrm>
-            <a:off x="914400" y="5029200"/>
-            <a:ext cx="10515600" cy="741045"/>
-          </a:xfrm>
-          <a:prstGeom prst="rect">
-            <a:avLst/>
-          </a:prstGeom>
-          <a:noFill/>
-        </p:spPr>
-        <p:txBody>
-          <a:bodyPr wrap="square">
-            <a:spAutoFit/>
-          </a:bodyPr>
-          <a:lstStyle/>
-          <a:p>
-            <a:pPr algn="l">
-              <a:spcAft>
-                <a:spcPts val="600"/>
-              </a:spcAft>
-              <a:defRPr/>
-            </a:pPr>
-            <a:r>
-              <a:rPr sz="1700" b="1" dirty="0" err="1">
-                <a:solidFill>
-                  <a:srgbClr val="202020"/>
-                </a:solidFill>
-                <a:latin typeface="맑은 고딕"/>
-              </a:rPr>
-              <a:t>원칙</a:t>
-            </a:r>
-            <a:r>
-              <a:rPr sz="1700" b="1" dirty="0">
-                <a:solidFill>
-                  <a:srgbClr val="202020"/>
-                </a:solidFill>
-                <a:latin typeface="맑은 고딕"/>
-              </a:rPr>
-              <a:t>: </a:t>
-            </a:r>
-            <a:r>
-              <a:rPr sz="1700" b="1" dirty="0" err="1">
-                <a:solidFill>
-                  <a:srgbClr val="202020"/>
-                </a:solidFill>
-                <a:latin typeface="맑은 고딕"/>
-              </a:rPr>
-              <a:t>확진</a:t>
-            </a:r>
-            <a:r>
-              <a:rPr sz="1700" b="1" dirty="0">
-                <a:solidFill>
-                  <a:srgbClr val="202020"/>
-                </a:solidFill>
-                <a:latin typeface="맑은 고딕"/>
-              </a:rPr>
-              <a:t> </a:t>
-            </a:r>
-            <a:r>
-              <a:rPr sz="1700" b="1" dirty="0" err="1">
-                <a:solidFill>
-                  <a:srgbClr val="202020"/>
-                </a:solidFill>
-                <a:latin typeface="맑은 고딕"/>
-              </a:rPr>
-              <a:t>라벨</a:t>
-            </a:r>
-            <a:r>
-              <a:rPr sz="1700" b="1" dirty="0">
-                <a:solidFill>
-                  <a:srgbClr val="202020"/>
-                </a:solidFill>
-                <a:latin typeface="맑은 고딕"/>
-              </a:rPr>
-              <a:t> </a:t>
-            </a:r>
-            <a:r>
-              <a:rPr sz="1700" b="1" dirty="0" err="1">
-                <a:solidFill>
-                  <a:srgbClr val="202020"/>
-                </a:solidFill>
-                <a:latin typeface="맑은 고딕"/>
-              </a:rPr>
-              <a:t>없는</a:t>
-            </a:r>
-            <a:r>
-              <a:rPr sz="1700" b="1" dirty="0">
-                <a:solidFill>
-                  <a:srgbClr val="202020"/>
-                </a:solidFill>
-                <a:latin typeface="맑은 고딕"/>
-              </a:rPr>
-              <a:t> </a:t>
-            </a:r>
-            <a:r>
-              <a:rPr sz="1700" b="1" dirty="0" err="1">
-                <a:solidFill>
-                  <a:srgbClr val="202020"/>
-                </a:solidFill>
-                <a:latin typeface="맑은 고딕"/>
-              </a:rPr>
-              <a:t>데이터는</a:t>
-            </a:r>
-            <a:r>
-              <a:rPr sz="1700" b="1" dirty="0">
-                <a:solidFill>
-                  <a:srgbClr val="202020"/>
-                </a:solidFill>
-                <a:latin typeface="맑은 고딕"/>
-              </a:rPr>
-              <a:t> </a:t>
-            </a:r>
-            <a:r>
-              <a:rPr sz="1700" b="1" dirty="0" err="1">
-                <a:solidFill>
-                  <a:srgbClr val="202020"/>
-                </a:solidFill>
-                <a:latin typeface="맑은 고딕"/>
-              </a:rPr>
-              <a:t>학습에</a:t>
-            </a:r>
-            <a:r>
-              <a:rPr sz="1700" b="1" dirty="0">
-                <a:solidFill>
-                  <a:srgbClr val="202020"/>
-                </a:solidFill>
-                <a:latin typeface="맑은 고딕"/>
-              </a:rPr>
-              <a:t> </a:t>
-            </a:r>
-            <a:r>
-              <a:rPr sz="1700" b="1" dirty="0" err="1">
-                <a:solidFill>
-                  <a:srgbClr val="202020"/>
-                </a:solidFill>
-                <a:latin typeface="맑은 고딕"/>
-              </a:rPr>
-              <a:t>쓰지</a:t>
-            </a:r>
-            <a:r>
-              <a:rPr sz="1700" b="1" dirty="0">
-                <a:solidFill>
-                  <a:srgbClr val="202020"/>
-                </a:solidFill>
-                <a:latin typeface="맑은 고딕"/>
-              </a:rPr>
-              <a:t> </a:t>
-            </a:r>
-            <a:r>
-              <a:rPr sz="1700" b="1" dirty="0" err="1">
-                <a:solidFill>
-                  <a:srgbClr val="202020"/>
-                </a:solidFill>
-                <a:latin typeface="맑은 고딕"/>
-              </a:rPr>
-              <a:t>않는다</a:t>
-            </a:r>
-            <a:r>
-              <a:rPr sz="1700" b="1" dirty="0">
-                <a:solidFill>
-                  <a:srgbClr val="202020"/>
-                </a:solidFill>
-                <a:latin typeface="맑은 고딕"/>
-              </a:rPr>
-              <a:t> — </a:t>
-            </a:r>
-            <a:r>
-              <a:rPr sz="1700" b="1" dirty="0" err="1">
-                <a:solidFill>
-                  <a:srgbClr val="202020"/>
-                </a:solidFill>
-                <a:latin typeface="맑은 고딕"/>
-              </a:rPr>
-              <a:t>모델이</a:t>
-            </a:r>
-            <a:r>
-              <a:rPr sz="1700" b="1" dirty="0">
-                <a:solidFill>
-                  <a:srgbClr val="202020"/>
-                </a:solidFill>
-                <a:latin typeface="맑은 고딕"/>
-              </a:rPr>
-              <a:t> </a:t>
-            </a:r>
-            <a:r>
-              <a:rPr sz="1700" b="1" dirty="0" err="1">
-                <a:solidFill>
-                  <a:srgbClr val="202020"/>
-                </a:solidFill>
-                <a:latin typeface="맑은 고딕"/>
-              </a:rPr>
-              <a:t>자기</a:t>
-            </a:r>
-            <a:r>
-              <a:rPr sz="1700" b="1" dirty="0">
-                <a:solidFill>
-                  <a:srgbClr val="202020"/>
-                </a:solidFill>
-                <a:latin typeface="맑은 고딕"/>
-              </a:rPr>
-              <a:t> </a:t>
-            </a:r>
-            <a:r>
-              <a:rPr sz="1700" b="1" dirty="0" err="1">
-                <a:solidFill>
-                  <a:srgbClr val="202020"/>
-                </a:solidFill>
-                <a:latin typeface="맑은 고딕"/>
-              </a:rPr>
-              <a:t>예측을</a:t>
-            </a:r>
-            <a:r>
-              <a:rPr sz="1700" b="1" dirty="0">
-                <a:solidFill>
-                  <a:srgbClr val="202020"/>
-                </a:solidFill>
-                <a:latin typeface="맑은 고딕"/>
-              </a:rPr>
-              <a:t> </a:t>
-            </a:r>
-            <a:r>
-              <a:rPr sz="1700" b="1" dirty="0" err="1">
-                <a:solidFill>
-                  <a:srgbClr val="202020"/>
-                </a:solidFill>
-                <a:latin typeface="맑은 고딕"/>
-              </a:rPr>
-              <a:t>정답처럼</a:t>
-            </a:r>
-            <a:r>
-              <a:rPr sz="1700" b="1" dirty="0">
-                <a:solidFill>
-                  <a:srgbClr val="202020"/>
-                </a:solidFill>
-                <a:latin typeface="맑은 고딕"/>
-              </a:rPr>
-              <a:t> </a:t>
-            </a:r>
-            <a:r>
-              <a:rPr sz="1700" b="1" dirty="0" err="1">
-                <a:solidFill>
-                  <a:srgbClr val="202020"/>
-                </a:solidFill>
-                <a:latin typeface="맑은 고딕"/>
-              </a:rPr>
-              <a:t>배우는</a:t>
-            </a:r>
-            <a:r>
-              <a:rPr sz="1700" b="1" dirty="0">
-                <a:solidFill>
-                  <a:srgbClr val="202020"/>
-                </a:solidFill>
-                <a:latin typeface="맑은 고딕"/>
-              </a:rPr>
-              <a:t> </a:t>
-            </a:r>
-            <a:r>
-              <a:rPr sz="1700" b="1" dirty="0" err="1">
-                <a:solidFill>
-                  <a:srgbClr val="202020"/>
-                </a:solidFill>
-                <a:latin typeface="맑은 고딕"/>
-              </a:rPr>
-              <a:t>오염</a:t>
-            </a:r>
-            <a:r>
-              <a:rPr sz="1700" b="1" dirty="0">
-                <a:solidFill>
-                  <a:srgbClr val="202020"/>
-                </a:solidFill>
-                <a:latin typeface="맑은 고딕"/>
-              </a:rPr>
-              <a:t> </a:t>
-            </a:r>
-            <a:r>
-              <a:rPr sz="1700" b="1" dirty="0" err="1">
-                <a:solidFill>
-                  <a:srgbClr val="202020"/>
-                </a:solidFill>
-                <a:latin typeface="맑은 고딕"/>
-              </a:rPr>
-              <a:t>방지</a:t>
-            </a:r>
-            <a:endParaRPr sz="1700" b="1" dirty="0">
-              <a:solidFill>
-                <a:srgbClr val="202020"/>
-              </a:solidFill>
-              <a:latin typeface="맑은 고딕"/>
-            </a:endParaRPr>
-          </a:p>
-          <a:p>
-            <a:pPr algn="l">
-              <a:spcAft>
-                <a:spcPts val="600"/>
-              </a:spcAft>
-              <a:defRPr/>
-            </a:pPr>
-            <a:r>
-              <a:rPr sz="2100" b="1" dirty="0">
-                <a:solidFill>
-                  <a:srgbClr val="2A78D6"/>
-                </a:solidFill>
-                <a:latin typeface="맑은 고딕"/>
-              </a:rPr>
-              <a:t>"</a:t>
-            </a:r>
-            <a:r>
-              <a:rPr sz="2100" b="1" dirty="0" err="1">
-                <a:solidFill>
-                  <a:srgbClr val="2A78D6"/>
-                </a:solidFill>
-                <a:latin typeface="맑은 고딕"/>
-              </a:rPr>
-              <a:t>지금</a:t>
-            </a:r>
-            <a:r>
-              <a:rPr sz="2100" b="1" dirty="0">
-                <a:solidFill>
-                  <a:srgbClr val="2A78D6"/>
-                </a:solidFill>
-                <a:latin typeface="맑은 고딕"/>
-              </a:rPr>
-              <a:t> 174명이라는 </a:t>
-            </a:r>
-            <a:r>
-              <a:rPr sz="2100" b="1" dirty="0" err="1">
-                <a:solidFill>
-                  <a:srgbClr val="2A78D6"/>
-                </a:solidFill>
-                <a:latin typeface="맑은 고딕"/>
-              </a:rPr>
-              <a:t>한계는</a:t>
-            </a:r>
-            <a:r>
-              <a:rPr sz="2100" b="1" dirty="0">
-                <a:solidFill>
-                  <a:srgbClr val="2A78D6"/>
-                </a:solidFill>
-                <a:latin typeface="맑은 고딕"/>
-              </a:rPr>
-              <a:t>, </a:t>
-            </a:r>
-            <a:r>
-              <a:rPr sz="2100" b="1" dirty="0" err="1">
-                <a:solidFill>
-                  <a:srgbClr val="2A78D6"/>
-                </a:solidFill>
-                <a:latin typeface="맑은 고딕"/>
-              </a:rPr>
-              <a:t>서비스가</a:t>
-            </a:r>
-            <a:r>
-              <a:rPr sz="2100" b="1" dirty="0">
-                <a:solidFill>
-                  <a:srgbClr val="2A78D6"/>
-                </a:solidFill>
-                <a:latin typeface="맑은 고딕"/>
-              </a:rPr>
-              <a:t> </a:t>
-            </a:r>
-            <a:r>
-              <a:rPr sz="2100" b="1" dirty="0" err="1">
-                <a:solidFill>
-                  <a:srgbClr val="2A78D6"/>
-                </a:solidFill>
-                <a:latin typeface="맑은 고딕"/>
-              </a:rPr>
-              <a:t>돌수록</a:t>
-            </a:r>
-            <a:r>
-              <a:rPr sz="2100" b="1" dirty="0">
-                <a:solidFill>
-                  <a:srgbClr val="2A78D6"/>
-                </a:solidFill>
-                <a:latin typeface="맑은 고딕"/>
-              </a:rPr>
-              <a:t> </a:t>
-            </a:r>
-            <a:r>
-              <a:rPr sz="2100" b="1" dirty="0" err="1">
-                <a:solidFill>
-                  <a:srgbClr val="2A78D6"/>
-                </a:solidFill>
-                <a:latin typeface="맑은 고딕"/>
-              </a:rPr>
-              <a:t>스스로</a:t>
-            </a:r>
-            <a:r>
-              <a:rPr sz="2100" b="1" dirty="0">
-                <a:solidFill>
-                  <a:srgbClr val="2A78D6"/>
-                </a:solidFill>
-                <a:latin typeface="맑은 고딕"/>
-              </a:rPr>
-              <a:t> </a:t>
-            </a:r>
-            <a:r>
-              <a:rPr sz="2100" b="1" dirty="0" err="1">
-                <a:solidFill>
-                  <a:srgbClr val="2A78D6"/>
-                </a:solidFill>
-                <a:latin typeface="맑은 고딕"/>
-              </a:rPr>
-              <a:t>풀리는</a:t>
-            </a:r>
-            <a:r>
-              <a:rPr sz="2100" b="1" dirty="0">
-                <a:solidFill>
-                  <a:srgbClr val="2A78D6"/>
-                </a:solidFill>
-                <a:latin typeface="맑은 고딕"/>
-              </a:rPr>
-              <a:t> </a:t>
-            </a:r>
-            <a:r>
-              <a:rPr sz="2100" b="1" dirty="0" err="1">
-                <a:solidFill>
-                  <a:srgbClr val="2A78D6"/>
-                </a:solidFill>
-                <a:latin typeface="맑은 고딕"/>
-              </a:rPr>
-              <a:t>구조입니다</a:t>
-            </a:r>
-            <a:r>
-              <a:rPr sz="2100" b="1" dirty="0">
-                <a:solidFill>
-                  <a:srgbClr val="2A78D6"/>
-                </a:solidFill>
-                <a:latin typeface="맑은 고딕"/>
-              </a:rPr>
-              <a:t>"</a:t>
-            </a:r>
-          </a:p>
-        </p:txBody>
-      </p:sp>
-      <p:sp>
-        <p:nvSpPr>
-          <p:cNvPr id="14" name="TextBox 13"/>
-          <p:cNvSpPr txBox="1"/>
-          <p:nvPr/>
-        </p:nvSpPr>
-        <p:spPr>
-          <a:xfrm>
-            <a:off x="11475720" y="6446520"/>
-            <a:ext cx="640080" cy="266700"/>
-          </a:xfrm>
-          <a:prstGeom prst="rect">
-            <a:avLst/>
-          </a:prstGeom>
-          <a:noFill/>
-        </p:spPr>
-        <p:txBody>
-          <a:bodyPr wrap="square">
-            <a:spAutoFit/>
-          </a:bodyPr>
-          <a:lstStyle/>
-          <a:p>
-            <a:pPr algn="r">
-              <a:spcAft>
-                <a:spcPts val="600"/>
-              </a:spcAft>
-              <a:defRPr/>
-            </a:pPr>
-            <a:r>
-              <a:rPr sz="1200" b="0">
-                <a:solidFill>
-                  <a:srgbClr val="666666"/>
-                </a:solidFill>
-                <a:latin typeface="맑은 고딕"/>
-              </a:rPr>
-              <a:t>20</a:t>
+              <a:t>서비스가 돌수록 반복 — 데이터가 쌓이고 모델이 좋아진다</a:t>
             </a:r>
           </a:p>
         </p:txBody>
